--- a/doc/개발환경_설치매뉴얼(VSCode).pptx
+++ b/doc/개발환경_설치매뉴얼(VSCode).pptx
@@ -6,25 +6,15 @@
   </p:sldMasterIdLst>
   <p:sldIdLst>
     <p:sldId id="256" r:id="rId2"/>
-    <p:sldId id="257" r:id="rId3"/>
-    <p:sldId id="258" r:id="rId4"/>
-    <p:sldId id="259" r:id="rId5"/>
-    <p:sldId id="260" r:id="rId6"/>
-    <p:sldId id="261" r:id="rId7"/>
-    <p:sldId id="262" r:id="rId8"/>
-    <p:sldId id="263" r:id="rId9"/>
-    <p:sldId id="264" r:id="rId10"/>
-    <p:sldId id="265" r:id="rId11"/>
-    <p:sldId id="275" r:id="rId12"/>
-    <p:sldId id="266" r:id="rId13"/>
-    <p:sldId id="267" r:id="rId14"/>
-    <p:sldId id="268" r:id="rId15"/>
-    <p:sldId id="269" r:id="rId16"/>
-    <p:sldId id="270" r:id="rId17"/>
-    <p:sldId id="271" r:id="rId18"/>
-    <p:sldId id="272" r:id="rId19"/>
-    <p:sldId id="273" r:id="rId20"/>
-    <p:sldId id="274" r:id="rId21"/>
+    <p:sldId id="266" r:id="rId3"/>
+    <p:sldId id="267" r:id="rId4"/>
+    <p:sldId id="268" r:id="rId5"/>
+    <p:sldId id="269" r:id="rId6"/>
+    <p:sldId id="270" r:id="rId7"/>
+    <p:sldId id="271" r:id="rId8"/>
+    <p:sldId id="272" r:id="rId9"/>
+    <p:sldId id="273" r:id="rId10"/>
+    <p:sldId id="274" r:id="rId11"/>
   </p:sldIdLst>
   <p:sldSz cx="12192000" cy="6858000"/>
   <p:notesSz cx="6858000" cy="9144000"/>
@@ -123,6 +113,11 @@
       </a:defRPr>
     </a:lvl9pPr>
   </p:defaultTextStyle>
+  <p:extLst>
+    <p:ext uri="{EFAFB233-063F-42B5-8137-9DF3F51BA10A}">
+      <p15:sldGuideLst xmlns:p15="http://schemas.microsoft.com/office/powerpoint/2012/main"/>
+    </p:ext>
+  </p:extLst>
 </p:presentation>
 </file>
 
@@ -273,7 +268,7 @@
           <a:p>
             <a:fld id="{7359EE32-49FD-4EA7-9011-353EB936649F}" type="datetimeFigureOut">
               <a:rPr lang="ko-KR" altLang="en-US" smtClean="0"/>
-              <a:t>2025-09-02</a:t>
+              <a:t>2025-09-03</a:t>
             </a:fld>
             <a:endParaRPr lang="ko-KR" altLang="en-US"/>
           </a:p>
@@ -471,7 +466,7 @@
           <a:p>
             <a:fld id="{7359EE32-49FD-4EA7-9011-353EB936649F}" type="datetimeFigureOut">
               <a:rPr lang="ko-KR" altLang="en-US" smtClean="0"/>
-              <a:t>2025-09-02</a:t>
+              <a:t>2025-09-03</a:t>
             </a:fld>
             <a:endParaRPr lang="ko-KR" altLang="en-US"/>
           </a:p>
@@ -679,7 +674,7 @@
           <a:p>
             <a:fld id="{7359EE32-49FD-4EA7-9011-353EB936649F}" type="datetimeFigureOut">
               <a:rPr lang="ko-KR" altLang="en-US" smtClean="0"/>
-              <a:t>2025-09-02</a:t>
+              <a:t>2025-09-03</a:t>
             </a:fld>
             <a:endParaRPr lang="ko-KR" altLang="en-US"/>
           </a:p>
@@ -877,7 +872,7 @@
           <a:p>
             <a:fld id="{7359EE32-49FD-4EA7-9011-353EB936649F}" type="datetimeFigureOut">
               <a:rPr lang="ko-KR" altLang="en-US" smtClean="0"/>
-              <a:t>2025-09-02</a:t>
+              <a:t>2025-09-03</a:t>
             </a:fld>
             <a:endParaRPr lang="ko-KR" altLang="en-US"/>
           </a:p>
@@ -1152,7 +1147,7 @@
           <a:p>
             <a:fld id="{7359EE32-49FD-4EA7-9011-353EB936649F}" type="datetimeFigureOut">
               <a:rPr lang="ko-KR" altLang="en-US" smtClean="0"/>
-              <a:t>2025-09-02</a:t>
+              <a:t>2025-09-03</a:t>
             </a:fld>
             <a:endParaRPr lang="ko-KR" altLang="en-US"/>
           </a:p>
@@ -1417,7 +1412,7 @@
           <a:p>
             <a:fld id="{7359EE32-49FD-4EA7-9011-353EB936649F}" type="datetimeFigureOut">
               <a:rPr lang="ko-KR" altLang="en-US" smtClean="0"/>
-              <a:t>2025-09-02</a:t>
+              <a:t>2025-09-03</a:t>
             </a:fld>
             <a:endParaRPr lang="ko-KR" altLang="en-US"/>
           </a:p>
@@ -1829,7 +1824,7 @@
           <a:p>
             <a:fld id="{7359EE32-49FD-4EA7-9011-353EB936649F}" type="datetimeFigureOut">
               <a:rPr lang="ko-KR" altLang="en-US" smtClean="0"/>
-              <a:t>2025-09-02</a:t>
+              <a:t>2025-09-03</a:t>
             </a:fld>
             <a:endParaRPr lang="ko-KR" altLang="en-US"/>
           </a:p>
@@ -1970,7 +1965,7 @@
           <a:p>
             <a:fld id="{7359EE32-49FD-4EA7-9011-353EB936649F}" type="datetimeFigureOut">
               <a:rPr lang="ko-KR" altLang="en-US" smtClean="0"/>
-              <a:t>2025-09-02</a:t>
+              <a:t>2025-09-03</a:t>
             </a:fld>
             <a:endParaRPr lang="ko-KR" altLang="en-US"/>
           </a:p>
@@ -2083,7 +2078,7 @@
           <a:p>
             <a:fld id="{7359EE32-49FD-4EA7-9011-353EB936649F}" type="datetimeFigureOut">
               <a:rPr lang="ko-KR" altLang="en-US" smtClean="0"/>
-              <a:t>2025-09-02</a:t>
+              <a:t>2025-09-03</a:t>
             </a:fld>
             <a:endParaRPr lang="ko-KR" altLang="en-US"/>
           </a:p>
@@ -2394,7 +2389,7 @@
           <a:p>
             <a:fld id="{7359EE32-49FD-4EA7-9011-353EB936649F}" type="datetimeFigureOut">
               <a:rPr lang="ko-KR" altLang="en-US" smtClean="0"/>
-              <a:t>2025-09-02</a:t>
+              <a:t>2025-09-03</a:t>
             </a:fld>
             <a:endParaRPr lang="ko-KR" altLang="en-US"/>
           </a:p>
@@ -2682,7 +2677,7 @@
           <a:p>
             <a:fld id="{7359EE32-49FD-4EA7-9011-353EB936649F}" type="datetimeFigureOut">
               <a:rPr lang="ko-KR" altLang="en-US" smtClean="0"/>
-              <a:t>2025-09-02</a:t>
+              <a:t>2025-09-03</a:t>
             </a:fld>
             <a:endParaRPr lang="ko-KR" altLang="en-US"/>
           </a:p>
@@ -2923,7 +2918,7 @@
           <a:p>
             <a:fld id="{7359EE32-49FD-4EA7-9011-353EB936649F}" type="datetimeFigureOut">
               <a:rPr lang="ko-KR" altLang="en-US" smtClean="0"/>
-              <a:t>2025-09-02</a:t>
+              <a:t>2025-09-03</a:t>
             </a:fld>
             <a:endParaRPr lang="ko-KR" altLang="en-US"/>
           </a:p>
@@ -3362,23 +3357,8 @@
           <a:lstStyle/>
           <a:p>
             <a:r>
-              <a:rPr lang="en-US" altLang="ko-KR" dirty="0"/>
-              <a:t>Node.JS + Vue.js</a:t>
-            </a:r>
-            <a:br>
-              <a:rPr lang="en-US" altLang="ko-KR" dirty="0"/>
-            </a:br>
-            <a:r>
-              <a:rPr lang="en-US" altLang="ko-KR" dirty="0"/>
-              <a:t>+ </a:t>
-            </a:r>
-            <a:r>
-              <a:rPr lang="ko-KR" altLang="en-US" dirty="0" err="1"/>
-              <a:t>개발툴</a:t>
-            </a:r>
-            <a:r>
               <a:rPr lang="ko-KR" altLang="en-US" dirty="0"/>
-              <a:t> 설치</a:t>
+              <a:t>개발환경 설치 매뉴얼</a:t>
             </a:r>
           </a:p>
         </p:txBody>
@@ -3404,7 +3384,11 @@
           <a:bodyPr/>
           <a:lstStyle/>
           <a:p>
-            <a:endParaRPr lang="ko-KR" altLang="en-US"/>
+            <a:r>
+              <a:rPr lang="en-US" altLang="ko-KR" dirty="0" err="1"/>
+              <a:t>VSCode</a:t>
+            </a:r>
+            <a:endParaRPr lang="ko-KR" altLang="en-US" dirty="0"/>
           </a:p>
         </p:txBody>
       </p:sp>
@@ -3443,7 +3427,7 @@
           <p:cNvPr id="2" name="제목 1">
             <a:extLst>
               <a:ext uri="{FF2B5EF4-FFF2-40B4-BE49-F238E27FC236}">
-                <a16:creationId xmlns:a16="http://schemas.microsoft.com/office/drawing/2014/main" id="{0BACFD30-BED1-E6B8-D319-F592C08E50CB}"/>
+                <a16:creationId xmlns:a16="http://schemas.microsoft.com/office/drawing/2014/main" id="{CEF16860-3D17-A741-D237-ACDFF39BE25B}"/>
               </a:ext>
             </a:extLst>
           </p:cNvPr>
@@ -3460,10 +3444,10 @@
           <a:lstStyle/>
           <a:p>
             <a:r>
-              <a:rPr lang="en-US" altLang="ko-KR" dirty="0"/>
-              <a:t>Node.js</a:t>
-            </a:r>
-            <a:endParaRPr lang="ko-KR" altLang="en-US" dirty="0"/>
+              <a:rPr lang="en-US" altLang="ko-KR"/>
+              <a:t>VSCode</a:t>
+            </a:r>
+            <a:endParaRPr lang="ko-KR" altLang="en-US"/>
           </a:p>
         </p:txBody>
       </p:sp>
@@ -3472,7 +3456,7 @@
           <p:cNvPr id="5" name="내용 개체 틀 4">
             <a:extLst>
               <a:ext uri="{FF2B5EF4-FFF2-40B4-BE49-F238E27FC236}">
-                <a16:creationId xmlns:a16="http://schemas.microsoft.com/office/drawing/2014/main" id="{E69C48DD-C918-9CA1-067A-E0EB04390F5B}"/>
+                <a16:creationId xmlns:a16="http://schemas.microsoft.com/office/drawing/2014/main" id="{2332EE4A-8580-F0E0-BD4F-EC29E539DACB}"/>
               </a:ext>
             </a:extLst>
           </p:cNvPr>
@@ -3491,8 +3475,8 @@
         </p:blipFill>
         <p:spPr>
           <a:xfrm>
-            <a:off x="3738562" y="2158206"/>
-            <a:ext cx="4714875" cy="3686175"/>
+            <a:off x="2832496" y="1825625"/>
+            <a:ext cx="6527007" cy="4351338"/>
           </a:xfrm>
           <a:prstGeom prst="rect">
             <a:avLst/>
@@ -3502,7 +3486,7 @@
     </p:spTree>
     <p:extLst>
       <p:ext uri="{BB962C8B-B14F-4D97-AF65-F5344CB8AC3E}">
-        <p14:creationId xmlns:p14="http://schemas.microsoft.com/office/powerpoint/2010/main" val="4025292655"/>
+        <p14:creationId xmlns:p14="http://schemas.microsoft.com/office/powerpoint/2010/main" val="348008065"/>
       </p:ext>
     </p:extLst>
   </p:cSld>
@@ -3512,121 +3496,7 @@
 </p:sld>
 </file>
 
-<file path=ppt/slides/slide11.xml><?xml version="1.0" encoding="utf-8"?>
-<p:sld xmlns:a="http://schemas.openxmlformats.org/drawingml/2006/main" xmlns:r="http://schemas.openxmlformats.org/officeDocument/2006/relationships" xmlns:p="http://schemas.openxmlformats.org/presentationml/2006/main">
-  <p:cSld>
-    <p:spTree>
-      <p:nvGrpSpPr>
-        <p:cNvPr id="1" name=""/>
-        <p:cNvGrpSpPr/>
-        <p:nvPr/>
-      </p:nvGrpSpPr>
-      <p:grpSpPr>
-        <a:xfrm>
-          <a:off x="0" y="0"/>
-          <a:ext cx="0" cy="0"/>
-          <a:chOff x="0" y="0"/>
-          <a:chExt cx="0" cy="0"/>
-        </a:xfrm>
-      </p:grpSpPr>
-      <p:sp>
-        <p:nvSpPr>
-          <p:cNvPr id="2" name="제목 1">
-            <a:extLst>
-              <a:ext uri="{FF2B5EF4-FFF2-40B4-BE49-F238E27FC236}">
-                <a16:creationId xmlns:a16="http://schemas.microsoft.com/office/drawing/2014/main" id="{E4DEDFDD-5BF6-95FE-8FD6-266AA3B6720D}"/>
-              </a:ext>
-            </a:extLst>
-          </p:cNvPr>
-          <p:cNvSpPr>
-            <a:spLocks noGrp="1"/>
-          </p:cNvSpPr>
-          <p:nvPr>
-            <p:ph type="title"/>
-          </p:nvPr>
-        </p:nvSpPr>
-        <p:spPr/>
-        <p:txBody>
-          <a:bodyPr/>
-          <a:lstStyle/>
-          <a:p>
-            <a:endParaRPr lang="ko-KR" altLang="en-US"/>
-          </a:p>
-        </p:txBody>
-      </p:sp>
-      <p:sp>
-        <p:nvSpPr>
-          <p:cNvPr id="7" name="내용 개체 틀 6">
-            <a:extLst>
-              <a:ext uri="{FF2B5EF4-FFF2-40B4-BE49-F238E27FC236}">
-                <a16:creationId xmlns:a16="http://schemas.microsoft.com/office/drawing/2014/main" id="{32A438D4-372D-794A-4B34-5EC714B993BD}"/>
-              </a:ext>
-            </a:extLst>
-          </p:cNvPr>
-          <p:cNvSpPr>
-            <a:spLocks noGrp="1"/>
-          </p:cNvSpPr>
-          <p:nvPr>
-            <p:ph idx="1"/>
-          </p:nvPr>
-        </p:nvSpPr>
-        <p:spPr/>
-        <p:txBody>
-          <a:bodyPr/>
-          <a:lstStyle/>
-          <a:p>
-            <a:r>
-              <a:rPr lang="en-US" altLang="ko-KR" dirty="0"/>
-              <a:t>Microsoft Windows [Version 10.0.19045.6216]</a:t>
-            </a:r>
-          </a:p>
-          <a:p>
-            <a:r>
-              <a:rPr lang="en-US" altLang="ko-KR" dirty="0"/>
-              <a:t>(c) Microsoft Corporation. All rights reserved.</a:t>
-            </a:r>
-          </a:p>
-          <a:p>
-            <a:endParaRPr lang="en-US" altLang="ko-KR" dirty="0"/>
-          </a:p>
-          <a:p>
-            <a:r>
-              <a:rPr lang="en-US" altLang="ko-KR" dirty="0"/>
-              <a:t>C:\Users\Admin&gt;node -v</a:t>
-            </a:r>
-          </a:p>
-          <a:p>
-            <a:r>
-              <a:rPr lang="en-US" altLang="ko-KR" dirty="0"/>
-              <a:t>v22.19.0</a:t>
-            </a:r>
-          </a:p>
-          <a:p>
-            <a:endParaRPr lang="en-US" altLang="ko-KR" dirty="0"/>
-          </a:p>
-          <a:p>
-            <a:r>
-              <a:rPr lang="en-US" altLang="ko-KR" dirty="0"/>
-              <a:t>C:\Users\Admin&gt;</a:t>
-            </a:r>
-            <a:endParaRPr lang="ko-KR" altLang="en-US" dirty="0"/>
-          </a:p>
-        </p:txBody>
-      </p:sp>
-    </p:spTree>
-    <p:extLst>
-      <p:ext uri="{BB962C8B-B14F-4D97-AF65-F5344CB8AC3E}">
-        <p14:creationId xmlns:p14="http://schemas.microsoft.com/office/powerpoint/2010/main" val="153230712"/>
-      </p:ext>
-    </p:extLst>
-  </p:cSld>
-  <p:clrMapOvr>
-    <a:masterClrMapping/>
-  </p:clrMapOvr>
-</p:sld>
-</file>
-
-<file path=ppt/slides/slide12.xml><?xml version="1.0" encoding="utf-8"?>
+<file path=ppt/slides/slide2.xml><?xml version="1.0" encoding="utf-8"?>
 <p:sld xmlns:a="http://schemas.openxmlformats.org/drawingml/2006/main" xmlns:r="http://schemas.openxmlformats.org/officeDocument/2006/relationships" xmlns:p="http://schemas.openxmlformats.org/presentationml/2006/main">
   <p:cSld>
     <p:spTree>
@@ -3717,7 +3587,7 @@
 </p:sld>
 </file>
 
-<file path=ppt/slides/slide13.xml><?xml version="1.0" encoding="utf-8"?>
+<file path=ppt/slides/slide3.xml><?xml version="1.0" encoding="utf-8"?>
 <p:sld xmlns:a="http://schemas.openxmlformats.org/drawingml/2006/main" xmlns:r="http://schemas.openxmlformats.org/officeDocument/2006/relationships" xmlns:p="http://schemas.openxmlformats.org/presentationml/2006/main">
   <p:cSld>
     <p:spTree>
@@ -3808,7 +3678,7 @@
 </p:sld>
 </file>
 
-<file path=ppt/slides/slide14.xml><?xml version="1.0" encoding="utf-8"?>
+<file path=ppt/slides/slide4.xml><?xml version="1.0" encoding="utf-8"?>
 <p:sld xmlns:a="http://schemas.openxmlformats.org/drawingml/2006/main" xmlns:r="http://schemas.openxmlformats.org/officeDocument/2006/relationships" xmlns:p="http://schemas.openxmlformats.org/presentationml/2006/main">
   <p:cSld>
     <p:spTree>
@@ -3899,7 +3769,7 @@
 </p:sld>
 </file>
 
-<file path=ppt/slides/slide15.xml><?xml version="1.0" encoding="utf-8"?>
+<file path=ppt/slides/slide5.xml><?xml version="1.0" encoding="utf-8"?>
 <p:sld xmlns:a="http://schemas.openxmlformats.org/drawingml/2006/main" xmlns:r="http://schemas.openxmlformats.org/officeDocument/2006/relationships" xmlns:p="http://schemas.openxmlformats.org/presentationml/2006/main">
   <p:cSld>
     <p:spTree>
@@ -3990,7 +3860,7 @@
 </p:sld>
 </file>
 
-<file path=ppt/slides/slide16.xml><?xml version="1.0" encoding="utf-8"?>
+<file path=ppt/slides/slide6.xml><?xml version="1.0" encoding="utf-8"?>
 <p:sld xmlns:a="http://schemas.openxmlformats.org/drawingml/2006/main" xmlns:r="http://schemas.openxmlformats.org/officeDocument/2006/relationships" xmlns:p="http://schemas.openxmlformats.org/presentationml/2006/main">
   <p:cSld>
     <p:spTree>
@@ -4081,7 +3951,7 @@
 </p:sld>
 </file>
 
-<file path=ppt/slides/slide17.xml><?xml version="1.0" encoding="utf-8"?>
+<file path=ppt/slides/slide7.xml><?xml version="1.0" encoding="utf-8"?>
 <p:sld xmlns:a="http://schemas.openxmlformats.org/drawingml/2006/main" xmlns:r="http://schemas.openxmlformats.org/officeDocument/2006/relationships" xmlns:p="http://schemas.openxmlformats.org/presentationml/2006/main">
   <p:cSld>
     <p:spTree>
@@ -4172,7 +4042,7 @@
 </p:sld>
 </file>
 
-<file path=ppt/slides/slide18.xml><?xml version="1.0" encoding="utf-8"?>
+<file path=ppt/slides/slide8.xml><?xml version="1.0" encoding="utf-8"?>
 <p:sld xmlns:a="http://schemas.openxmlformats.org/drawingml/2006/main" xmlns:r="http://schemas.openxmlformats.org/officeDocument/2006/relationships" xmlns:p="http://schemas.openxmlformats.org/presentationml/2006/main">
   <p:cSld>
     <p:spTree>
@@ -4263,7 +4133,7 @@
 </p:sld>
 </file>
 
-<file path=ppt/slides/slide19.xml><?xml version="1.0" encoding="utf-8"?>
+<file path=ppt/slides/slide9.xml><?xml version="1.0" encoding="utf-8"?>
 <p:sld xmlns:a="http://schemas.openxmlformats.org/drawingml/2006/main" xmlns:r="http://schemas.openxmlformats.org/officeDocument/2006/relationships" xmlns:p="http://schemas.openxmlformats.org/presentationml/2006/main">
   <p:cSld>
     <p:spTree>
@@ -4345,825 +4215,6 @@
     <p:extLst>
       <p:ext uri="{BB962C8B-B14F-4D97-AF65-F5344CB8AC3E}">
         <p14:creationId xmlns:p14="http://schemas.microsoft.com/office/powerpoint/2010/main" val="238489830"/>
-      </p:ext>
-    </p:extLst>
-  </p:cSld>
-  <p:clrMapOvr>
-    <a:masterClrMapping/>
-  </p:clrMapOvr>
-</p:sld>
-</file>
-
-<file path=ppt/slides/slide2.xml><?xml version="1.0" encoding="utf-8"?>
-<p:sld xmlns:a="http://schemas.openxmlformats.org/drawingml/2006/main" xmlns:r="http://schemas.openxmlformats.org/officeDocument/2006/relationships" xmlns:p="http://schemas.openxmlformats.org/presentationml/2006/main">
-  <p:cSld>
-    <p:spTree>
-      <p:nvGrpSpPr>
-        <p:cNvPr id="1" name=""/>
-        <p:cNvGrpSpPr/>
-        <p:nvPr/>
-      </p:nvGrpSpPr>
-      <p:grpSpPr>
-        <a:xfrm>
-          <a:off x="0" y="0"/>
-          <a:ext cx="0" cy="0"/>
-          <a:chOff x="0" y="0"/>
-          <a:chExt cx="0" cy="0"/>
-        </a:xfrm>
-      </p:grpSpPr>
-      <p:sp>
-        <p:nvSpPr>
-          <p:cNvPr id="2" name="제목 1">
-            <a:extLst>
-              <a:ext uri="{FF2B5EF4-FFF2-40B4-BE49-F238E27FC236}">
-                <a16:creationId xmlns:a16="http://schemas.microsoft.com/office/drawing/2014/main" id="{4CACBD0E-5059-1CC8-E4F0-DE6109D14820}"/>
-              </a:ext>
-            </a:extLst>
-          </p:cNvPr>
-          <p:cNvSpPr>
-            <a:spLocks noGrp="1"/>
-          </p:cNvSpPr>
-          <p:nvPr>
-            <p:ph type="title"/>
-          </p:nvPr>
-        </p:nvSpPr>
-        <p:spPr/>
-        <p:txBody>
-          <a:bodyPr/>
-          <a:lstStyle/>
-          <a:p>
-            <a:r>
-              <a:rPr lang="en-US" altLang="ko-KR" dirty="0"/>
-              <a:t>Node.js</a:t>
-            </a:r>
-            <a:endParaRPr lang="ko-KR" altLang="en-US" dirty="0"/>
-          </a:p>
-        </p:txBody>
-      </p:sp>
-      <p:pic>
-        <p:nvPicPr>
-          <p:cNvPr id="5" name="내용 개체 틀 4">
-            <a:extLst>
-              <a:ext uri="{FF2B5EF4-FFF2-40B4-BE49-F238E27FC236}">
-                <a16:creationId xmlns:a16="http://schemas.microsoft.com/office/drawing/2014/main" id="{BF6CF475-468A-605A-E82A-7A9C317A331C}"/>
-              </a:ext>
-            </a:extLst>
-          </p:cNvPr>
-          <p:cNvPicPr>
-            <a:picLocks noGrp="1" noChangeAspect="1"/>
-          </p:cNvPicPr>
-          <p:nvPr>
-            <p:ph idx="1"/>
-          </p:nvPr>
-        </p:nvPicPr>
-        <p:blipFill>
-          <a:blip r:embed="rId2"/>
-          <a:stretch>
-            <a:fillRect/>
-          </a:stretch>
-        </p:blipFill>
-        <p:spPr>
-          <a:xfrm>
-            <a:off x="838200" y="2027768"/>
-            <a:ext cx="10515600" cy="3947052"/>
-          </a:xfrm>
-          <a:prstGeom prst="rect">
-            <a:avLst/>
-          </a:prstGeom>
-        </p:spPr>
-      </p:pic>
-    </p:spTree>
-    <p:extLst>
-      <p:ext uri="{BB962C8B-B14F-4D97-AF65-F5344CB8AC3E}">
-        <p14:creationId xmlns:p14="http://schemas.microsoft.com/office/powerpoint/2010/main" val="4155212163"/>
-      </p:ext>
-    </p:extLst>
-  </p:cSld>
-  <p:clrMapOvr>
-    <a:masterClrMapping/>
-  </p:clrMapOvr>
-</p:sld>
-</file>
-
-<file path=ppt/slides/slide20.xml><?xml version="1.0" encoding="utf-8"?>
-<p:sld xmlns:a="http://schemas.openxmlformats.org/drawingml/2006/main" xmlns:r="http://schemas.openxmlformats.org/officeDocument/2006/relationships" xmlns:p="http://schemas.openxmlformats.org/presentationml/2006/main">
-  <p:cSld>
-    <p:spTree>
-      <p:nvGrpSpPr>
-        <p:cNvPr id="1" name=""/>
-        <p:cNvGrpSpPr/>
-        <p:nvPr/>
-      </p:nvGrpSpPr>
-      <p:grpSpPr>
-        <a:xfrm>
-          <a:off x="0" y="0"/>
-          <a:ext cx="0" cy="0"/>
-          <a:chOff x="0" y="0"/>
-          <a:chExt cx="0" cy="0"/>
-        </a:xfrm>
-      </p:grpSpPr>
-      <p:sp>
-        <p:nvSpPr>
-          <p:cNvPr id="2" name="제목 1">
-            <a:extLst>
-              <a:ext uri="{FF2B5EF4-FFF2-40B4-BE49-F238E27FC236}">
-                <a16:creationId xmlns:a16="http://schemas.microsoft.com/office/drawing/2014/main" id="{CEF16860-3D17-A741-D237-ACDFF39BE25B}"/>
-              </a:ext>
-            </a:extLst>
-          </p:cNvPr>
-          <p:cNvSpPr>
-            <a:spLocks noGrp="1"/>
-          </p:cNvSpPr>
-          <p:nvPr>
-            <p:ph type="title"/>
-          </p:nvPr>
-        </p:nvSpPr>
-        <p:spPr/>
-        <p:txBody>
-          <a:bodyPr/>
-          <a:lstStyle/>
-          <a:p>
-            <a:r>
-              <a:rPr lang="en-US" altLang="ko-KR"/>
-              <a:t>VSCode</a:t>
-            </a:r>
-            <a:endParaRPr lang="ko-KR" altLang="en-US"/>
-          </a:p>
-        </p:txBody>
-      </p:sp>
-      <p:pic>
-        <p:nvPicPr>
-          <p:cNvPr id="5" name="내용 개체 틀 4">
-            <a:extLst>
-              <a:ext uri="{FF2B5EF4-FFF2-40B4-BE49-F238E27FC236}">
-                <a16:creationId xmlns:a16="http://schemas.microsoft.com/office/drawing/2014/main" id="{2332EE4A-8580-F0E0-BD4F-EC29E539DACB}"/>
-              </a:ext>
-            </a:extLst>
-          </p:cNvPr>
-          <p:cNvPicPr>
-            <a:picLocks noGrp="1" noChangeAspect="1"/>
-          </p:cNvPicPr>
-          <p:nvPr>
-            <p:ph idx="1"/>
-          </p:nvPr>
-        </p:nvPicPr>
-        <p:blipFill>
-          <a:blip r:embed="rId2"/>
-          <a:stretch>
-            <a:fillRect/>
-          </a:stretch>
-        </p:blipFill>
-        <p:spPr>
-          <a:xfrm>
-            <a:off x="2832496" y="1825625"/>
-            <a:ext cx="6527007" cy="4351338"/>
-          </a:xfrm>
-          <a:prstGeom prst="rect">
-            <a:avLst/>
-          </a:prstGeom>
-        </p:spPr>
-      </p:pic>
-    </p:spTree>
-    <p:extLst>
-      <p:ext uri="{BB962C8B-B14F-4D97-AF65-F5344CB8AC3E}">
-        <p14:creationId xmlns:p14="http://schemas.microsoft.com/office/powerpoint/2010/main" val="348008065"/>
-      </p:ext>
-    </p:extLst>
-  </p:cSld>
-  <p:clrMapOvr>
-    <a:masterClrMapping/>
-  </p:clrMapOvr>
-</p:sld>
-</file>
-
-<file path=ppt/slides/slide3.xml><?xml version="1.0" encoding="utf-8"?>
-<p:sld xmlns:a="http://schemas.openxmlformats.org/drawingml/2006/main" xmlns:r="http://schemas.openxmlformats.org/officeDocument/2006/relationships" xmlns:p="http://schemas.openxmlformats.org/presentationml/2006/main">
-  <p:cSld>
-    <p:spTree>
-      <p:nvGrpSpPr>
-        <p:cNvPr id="1" name=""/>
-        <p:cNvGrpSpPr/>
-        <p:nvPr/>
-      </p:nvGrpSpPr>
-      <p:grpSpPr>
-        <a:xfrm>
-          <a:off x="0" y="0"/>
-          <a:ext cx="0" cy="0"/>
-          <a:chOff x="0" y="0"/>
-          <a:chExt cx="0" cy="0"/>
-        </a:xfrm>
-      </p:grpSpPr>
-      <p:sp>
-        <p:nvSpPr>
-          <p:cNvPr id="2" name="제목 1">
-            <a:extLst>
-              <a:ext uri="{FF2B5EF4-FFF2-40B4-BE49-F238E27FC236}">
-                <a16:creationId xmlns:a16="http://schemas.microsoft.com/office/drawing/2014/main" id="{0F3D6772-A679-D559-751D-2FBA146A06D3}"/>
-              </a:ext>
-            </a:extLst>
-          </p:cNvPr>
-          <p:cNvSpPr>
-            <a:spLocks noGrp="1"/>
-          </p:cNvSpPr>
-          <p:nvPr>
-            <p:ph type="title"/>
-          </p:nvPr>
-        </p:nvSpPr>
-        <p:spPr/>
-        <p:txBody>
-          <a:bodyPr/>
-          <a:lstStyle/>
-          <a:p>
-            <a:r>
-              <a:rPr lang="en-US" altLang="ko-KR" dirty="0"/>
-              <a:t>Node.js</a:t>
-            </a:r>
-            <a:endParaRPr lang="ko-KR" altLang="en-US" dirty="0"/>
-          </a:p>
-        </p:txBody>
-      </p:sp>
-      <p:pic>
-        <p:nvPicPr>
-          <p:cNvPr id="5" name="내용 개체 틀 4">
-            <a:extLst>
-              <a:ext uri="{FF2B5EF4-FFF2-40B4-BE49-F238E27FC236}">
-                <a16:creationId xmlns:a16="http://schemas.microsoft.com/office/drawing/2014/main" id="{02E0DA01-7E6C-BA64-D369-85CA06C600F5}"/>
-              </a:ext>
-            </a:extLst>
-          </p:cNvPr>
-          <p:cNvPicPr>
-            <a:picLocks noGrp="1" noChangeAspect="1"/>
-          </p:cNvPicPr>
-          <p:nvPr>
-            <p:ph idx="1"/>
-          </p:nvPr>
-        </p:nvPicPr>
-        <p:blipFill>
-          <a:blip r:embed="rId2"/>
-          <a:stretch>
-            <a:fillRect/>
-          </a:stretch>
-        </p:blipFill>
-        <p:spPr>
-          <a:xfrm>
-            <a:off x="3738562" y="2158206"/>
-            <a:ext cx="4714875" cy="3686175"/>
-          </a:xfrm>
-          <a:prstGeom prst="rect">
-            <a:avLst/>
-          </a:prstGeom>
-        </p:spPr>
-      </p:pic>
-    </p:spTree>
-    <p:extLst>
-      <p:ext uri="{BB962C8B-B14F-4D97-AF65-F5344CB8AC3E}">
-        <p14:creationId xmlns:p14="http://schemas.microsoft.com/office/powerpoint/2010/main" val="3388483171"/>
-      </p:ext>
-    </p:extLst>
-  </p:cSld>
-  <p:clrMapOvr>
-    <a:masterClrMapping/>
-  </p:clrMapOvr>
-</p:sld>
-</file>
-
-<file path=ppt/slides/slide4.xml><?xml version="1.0" encoding="utf-8"?>
-<p:sld xmlns:a="http://schemas.openxmlformats.org/drawingml/2006/main" xmlns:r="http://schemas.openxmlformats.org/officeDocument/2006/relationships" xmlns:p="http://schemas.openxmlformats.org/presentationml/2006/main">
-  <p:cSld>
-    <p:spTree>
-      <p:nvGrpSpPr>
-        <p:cNvPr id="1" name=""/>
-        <p:cNvGrpSpPr/>
-        <p:nvPr/>
-      </p:nvGrpSpPr>
-      <p:grpSpPr>
-        <a:xfrm>
-          <a:off x="0" y="0"/>
-          <a:ext cx="0" cy="0"/>
-          <a:chOff x="0" y="0"/>
-          <a:chExt cx="0" cy="0"/>
-        </a:xfrm>
-      </p:grpSpPr>
-      <p:sp>
-        <p:nvSpPr>
-          <p:cNvPr id="2" name="제목 1">
-            <a:extLst>
-              <a:ext uri="{FF2B5EF4-FFF2-40B4-BE49-F238E27FC236}">
-                <a16:creationId xmlns:a16="http://schemas.microsoft.com/office/drawing/2014/main" id="{C713D0A9-7F61-B76E-239D-4EFF7708BC4C}"/>
-              </a:ext>
-            </a:extLst>
-          </p:cNvPr>
-          <p:cNvSpPr>
-            <a:spLocks noGrp="1"/>
-          </p:cNvSpPr>
-          <p:nvPr>
-            <p:ph type="title"/>
-          </p:nvPr>
-        </p:nvSpPr>
-        <p:spPr/>
-        <p:txBody>
-          <a:bodyPr/>
-          <a:lstStyle/>
-          <a:p>
-            <a:r>
-              <a:rPr lang="en-US" altLang="ko-KR" dirty="0"/>
-              <a:t>Node.js</a:t>
-            </a:r>
-            <a:endParaRPr lang="ko-KR" altLang="en-US" dirty="0"/>
-          </a:p>
-        </p:txBody>
-      </p:sp>
-      <p:pic>
-        <p:nvPicPr>
-          <p:cNvPr id="5" name="내용 개체 틀 4">
-            <a:extLst>
-              <a:ext uri="{FF2B5EF4-FFF2-40B4-BE49-F238E27FC236}">
-                <a16:creationId xmlns:a16="http://schemas.microsoft.com/office/drawing/2014/main" id="{B5728FA0-4FBE-AF71-0C90-39DAD4E4E534}"/>
-              </a:ext>
-            </a:extLst>
-          </p:cNvPr>
-          <p:cNvPicPr>
-            <a:picLocks noGrp="1" noChangeAspect="1"/>
-          </p:cNvPicPr>
-          <p:nvPr>
-            <p:ph idx="1"/>
-          </p:nvPr>
-        </p:nvPicPr>
-        <p:blipFill>
-          <a:blip r:embed="rId2"/>
-          <a:stretch>
-            <a:fillRect/>
-          </a:stretch>
-        </p:blipFill>
-        <p:spPr>
-          <a:xfrm>
-            <a:off x="3738562" y="2158206"/>
-            <a:ext cx="4714875" cy="3686175"/>
-          </a:xfrm>
-          <a:prstGeom prst="rect">
-            <a:avLst/>
-          </a:prstGeom>
-        </p:spPr>
-      </p:pic>
-    </p:spTree>
-    <p:extLst>
-      <p:ext uri="{BB962C8B-B14F-4D97-AF65-F5344CB8AC3E}">
-        <p14:creationId xmlns:p14="http://schemas.microsoft.com/office/powerpoint/2010/main" val="3763064705"/>
-      </p:ext>
-    </p:extLst>
-  </p:cSld>
-  <p:clrMapOvr>
-    <a:masterClrMapping/>
-  </p:clrMapOvr>
-</p:sld>
-</file>
-
-<file path=ppt/slides/slide5.xml><?xml version="1.0" encoding="utf-8"?>
-<p:sld xmlns:a="http://schemas.openxmlformats.org/drawingml/2006/main" xmlns:r="http://schemas.openxmlformats.org/officeDocument/2006/relationships" xmlns:p="http://schemas.openxmlformats.org/presentationml/2006/main">
-  <p:cSld>
-    <p:spTree>
-      <p:nvGrpSpPr>
-        <p:cNvPr id="1" name=""/>
-        <p:cNvGrpSpPr/>
-        <p:nvPr/>
-      </p:nvGrpSpPr>
-      <p:grpSpPr>
-        <a:xfrm>
-          <a:off x="0" y="0"/>
-          <a:ext cx="0" cy="0"/>
-          <a:chOff x="0" y="0"/>
-          <a:chExt cx="0" cy="0"/>
-        </a:xfrm>
-      </p:grpSpPr>
-      <p:sp>
-        <p:nvSpPr>
-          <p:cNvPr id="2" name="제목 1">
-            <a:extLst>
-              <a:ext uri="{FF2B5EF4-FFF2-40B4-BE49-F238E27FC236}">
-                <a16:creationId xmlns:a16="http://schemas.microsoft.com/office/drawing/2014/main" id="{0E0D0618-76AA-610D-E7E3-30274B0A7281}"/>
-              </a:ext>
-            </a:extLst>
-          </p:cNvPr>
-          <p:cNvSpPr>
-            <a:spLocks noGrp="1"/>
-          </p:cNvSpPr>
-          <p:nvPr>
-            <p:ph type="title"/>
-          </p:nvPr>
-        </p:nvSpPr>
-        <p:spPr/>
-        <p:txBody>
-          <a:bodyPr/>
-          <a:lstStyle/>
-          <a:p>
-            <a:r>
-              <a:rPr lang="en-US" altLang="ko-KR" dirty="0"/>
-              <a:t>Node.js</a:t>
-            </a:r>
-            <a:endParaRPr lang="ko-KR" altLang="en-US" dirty="0"/>
-          </a:p>
-        </p:txBody>
-      </p:sp>
-      <p:pic>
-        <p:nvPicPr>
-          <p:cNvPr id="5" name="내용 개체 틀 4">
-            <a:extLst>
-              <a:ext uri="{FF2B5EF4-FFF2-40B4-BE49-F238E27FC236}">
-                <a16:creationId xmlns:a16="http://schemas.microsoft.com/office/drawing/2014/main" id="{C030B8DB-B24C-CC94-18D2-32C8F0578301}"/>
-              </a:ext>
-            </a:extLst>
-          </p:cNvPr>
-          <p:cNvPicPr>
-            <a:picLocks noGrp="1" noChangeAspect="1"/>
-          </p:cNvPicPr>
-          <p:nvPr>
-            <p:ph idx="1"/>
-          </p:nvPr>
-        </p:nvPicPr>
-        <p:blipFill>
-          <a:blip r:embed="rId2"/>
-          <a:stretch>
-            <a:fillRect/>
-          </a:stretch>
-        </p:blipFill>
-        <p:spPr>
-          <a:xfrm>
-            <a:off x="3738562" y="2158206"/>
-            <a:ext cx="4714875" cy="3686175"/>
-          </a:xfrm>
-          <a:prstGeom prst="rect">
-            <a:avLst/>
-          </a:prstGeom>
-        </p:spPr>
-      </p:pic>
-    </p:spTree>
-    <p:extLst>
-      <p:ext uri="{BB962C8B-B14F-4D97-AF65-F5344CB8AC3E}">
-        <p14:creationId xmlns:p14="http://schemas.microsoft.com/office/powerpoint/2010/main" val="634765400"/>
-      </p:ext>
-    </p:extLst>
-  </p:cSld>
-  <p:clrMapOvr>
-    <a:masterClrMapping/>
-  </p:clrMapOvr>
-</p:sld>
-</file>
-
-<file path=ppt/slides/slide6.xml><?xml version="1.0" encoding="utf-8"?>
-<p:sld xmlns:a="http://schemas.openxmlformats.org/drawingml/2006/main" xmlns:r="http://schemas.openxmlformats.org/officeDocument/2006/relationships" xmlns:p="http://schemas.openxmlformats.org/presentationml/2006/main">
-  <p:cSld>
-    <p:spTree>
-      <p:nvGrpSpPr>
-        <p:cNvPr id="1" name=""/>
-        <p:cNvGrpSpPr/>
-        <p:nvPr/>
-      </p:nvGrpSpPr>
-      <p:grpSpPr>
-        <a:xfrm>
-          <a:off x="0" y="0"/>
-          <a:ext cx="0" cy="0"/>
-          <a:chOff x="0" y="0"/>
-          <a:chExt cx="0" cy="0"/>
-        </a:xfrm>
-      </p:grpSpPr>
-      <p:sp>
-        <p:nvSpPr>
-          <p:cNvPr id="2" name="제목 1">
-            <a:extLst>
-              <a:ext uri="{FF2B5EF4-FFF2-40B4-BE49-F238E27FC236}">
-                <a16:creationId xmlns:a16="http://schemas.microsoft.com/office/drawing/2014/main" id="{F2C4D589-EEFD-0A32-0E79-939A42DF826A}"/>
-              </a:ext>
-            </a:extLst>
-          </p:cNvPr>
-          <p:cNvSpPr>
-            <a:spLocks noGrp="1"/>
-          </p:cNvSpPr>
-          <p:nvPr>
-            <p:ph type="title"/>
-          </p:nvPr>
-        </p:nvSpPr>
-        <p:spPr/>
-        <p:txBody>
-          <a:bodyPr/>
-          <a:lstStyle/>
-          <a:p>
-            <a:r>
-              <a:rPr lang="en-US" altLang="ko-KR" dirty="0"/>
-              <a:t>Node.js</a:t>
-            </a:r>
-            <a:endParaRPr lang="ko-KR" altLang="en-US" dirty="0"/>
-          </a:p>
-        </p:txBody>
-      </p:sp>
-      <p:pic>
-        <p:nvPicPr>
-          <p:cNvPr id="5" name="내용 개체 틀 4">
-            <a:extLst>
-              <a:ext uri="{FF2B5EF4-FFF2-40B4-BE49-F238E27FC236}">
-                <a16:creationId xmlns:a16="http://schemas.microsoft.com/office/drawing/2014/main" id="{D3C9DC02-28DA-42D5-5805-DF37B9827372}"/>
-              </a:ext>
-            </a:extLst>
-          </p:cNvPr>
-          <p:cNvPicPr>
-            <a:picLocks noGrp="1" noChangeAspect="1"/>
-          </p:cNvPicPr>
-          <p:nvPr>
-            <p:ph idx="1"/>
-          </p:nvPr>
-        </p:nvPicPr>
-        <p:blipFill>
-          <a:blip r:embed="rId2"/>
-          <a:stretch>
-            <a:fillRect/>
-          </a:stretch>
-        </p:blipFill>
-        <p:spPr>
-          <a:xfrm>
-            <a:off x="3738562" y="2158206"/>
-            <a:ext cx="4714875" cy="3686175"/>
-          </a:xfrm>
-          <a:prstGeom prst="rect">
-            <a:avLst/>
-          </a:prstGeom>
-        </p:spPr>
-      </p:pic>
-    </p:spTree>
-    <p:extLst>
-      <p:ext uri="{BB962C8B-B14F-4D97-AF65-F5344CB8AC3E}">
-        <p14:creationId xmlns:p14="http://schemas.microsoft.com/office/powerpoint/2010/main" val="2098447810"/>
-      </p:ext>
-    </p:extLst>
-  </p:cSld>
-  <p:clrMapOvr>
-    <a:masterClrMapping/>
-  </p:clrMapOvr>
-</p:sld>
-</file>
-
-<file path=ppt/slides/slide7.xml><?xml version="1.0" encoding="utf-8"?>
-<p:sld xmlns:a="http://schemas.openxmlformats.org/drawingml/2006/main" xmlns:r="http://schemas.openxmlformats.org/officeDocument/2006/relationships" xmlns:p="http://schemas.openxmlformats.org/presentationml/2006/main">
-  <p:cSld>
-    <p:spTree>
-      <p:nvGrpSpPr>
-        <p:cNvPr id="1" name=""/>
-        <p:cNvGrpSpPr/>
-        <p:nvPr/>
-      </p:nvGrpSpPr>
-      <p:grpSpPr>
-        <a:xfrm>
-          <a:off x="0" y="0"/>
-          <a:ext cx="0" cy="0"/>
-          <a:chOff x="0" y="0"/>
-          <a:chExt cx="0" cy="0"/>
-        </a:xfrm>
-      </p:grpSpPr>
-      <p:sp>
-        <p:nvSpPr>
-          <p:cNvPr id="2" name="제목 1">
-            <a:extLst>
-              <a:ext uri="{FF2B5EF4-FFF2-40B4-BE49-F238E27FC236}">
-                <a16:creationId xmlns:a16="http://schemas.microsoft.com/office/drawing/2014/main" id="{B0D13323-ABAE-633A-5AB2-A987F76DF2BE}"/>
-              </a:ext>
-            </a:extLst>
-          </p:cNvPr>
-          <p:cNvSpPr>
-            <a:spLocks noGrp="1"/>
-          </p:cNvSpPr>
-          <p:nvPr>
-            <p:ph type="title"/>
-          </p:nvPr>
-        </p:nvSpPr>
-        <p:spPr/>
-        <p:txBody>
-          <a:bodyPr/>
-          <a:lstStyle/>
-          <a:p>
-            <a:r>
-              <a:rPr lang="en-US" altLang="ko-KR" dirty="0"/>
-              <a:t>Node.js</a:t>
-            </a:r>
-            <a:endParaRPr lang="ko-KR" altLang="en-US" dirty="0"/>
-          </a:p>
-        </p:txBody>
-      </p:sp>
-      <p:pic>
-        <p:nvPicPr>
-          <p:cNvPr id="5" name="내용 개체 틀 4">
-            <a:extLst>
-              <a:ext uri="{FF2B5EF4-FFF2-40B4-BE49-F238E27FC236}">
-                <a16:creationId xmlns:a16="http://schemas.microsoft.com/office/drawing/2014/main" id="{279A96A2-6B3D-6A68-B4B8-64C065A13815}"/>
-              </a:ext>
-            </a:extLst>
-          </p:cNvPr>
-          <p:cNvPicPr>
-            <a:picLocks noGrp="1" noChangeAspect="1"/>
-          </p:cNvPicPr>
-          <p:nvPr>
-            <p:ph idx="1"/>
-          </p:nvPr>
-        </p:nvPicPr>
-        <p:blipFill>
-          <a:blip r:embed="rId2"/>
-          <a:stretch>
-            <a:fillRect/>
-          </a:stretch>
-        </p:blipFill>
-        <p:spPr>
-          <a:xfrm>
-            <a:off x="3738562" y="2158206"/>
-            <a:ext cx="4714875" cy="3686175"/>
-          </a:xfrm>
-          <a:prstGeom prst="rect">
-            <a:avLst/>
-          </a:prstGeom>
-        </p:spPr>
-      </p:pic>
-    </p:spTree>
-    <p:extLst>
-      <p:ext uri="{BB962C8B-B14F-4D97-AF65-F5344CB8AC3E}">
-        <p14:creationId xmlns:p14="http://schemas.microsoft.com/office/powerpoint/2010/main" val="290309789"/>
-      </p:ext>
-    </p:extLst>
-  </p:cSld>
-  <p:clrMapOvr>
-    <a:masterClrMapping/>
-  </p:clrMapOvr>
-</p:sld>
-</file>
-
-<file path=ppt/slides/slide8.xml><?xml version="1.0" encoding="utf-8"?>
-<p:sld xmlns:a="http://schemas.openxmlformats.org/drawingml/2006/main" xmlns:r="http://schemas.openxmlformats.org/officeDocument/2006/relationships" xmlns:p="http://schemas.openxmlformats.org/presentationml/2006/main">
-  <p:cSld>
-    <p:spTree>
-      <p:nvGrpSpPr>
-        <p:cNvPr id="1" name=""/>
-        <p:cNvGrpSpPr/>
-        <p:nvPr/>
-      </p:nvGrpSpPr>
-      <p:grpSpPr>
-        <a:xfrm>
-          <a:off x="0" y="0"/>
-          <a:ext cx="0" cy="0"/>
-          <a:chOff x="0" y="0"/>
-          <a:chExt cx="0" cy="0"/>
-        </a:xfrm>
-      </p:grpSpPr>
-      <p:sp>
-        <p:nvSpPr>
-          <p:cNvPr id="2" name="제목 1">
-            <a:extLst>
-              <a:ext uri="{FF2B5EF4-FFF2-40B4-BE49-F238E27FC236}">
-                <a16:creationId xmlns:a16="http://schemas.microsoft.com/office/drawing/2014/main" id="{81B03077-6914-B504-A0E8-CAAF31B80179}"/>
-              </a:ext>
-            </a:extLst>
-          </p:cNvPr>
-          <p:cNvSpPr>
-            <a:spLocks noGrp="1"/>
-          </p:cNvSpPr>
-          <p:nvPr>
-            <p:ph type="title"/>
-          </p:nvPr>
-        </p:nvSpPr>
-        <p:spPr/>
-        <p:txBody>
-          <a:bodyPr/>
-          <a:lstStyle/>
-          <a:p>
-            <a:r>
-              <a:rPr lang="en-US" altLang="ko-KR" dirty="0"/>
-              <a:t>Node.js</a:t>
-            </a:r>
-            <a:endParaRPr lang="ko-KR" altLang="en-US" dirty="0"/>
-          </a:p>
-        </p:txBody>
-      </p:sp>
-      <p:pic>
-        <p:nvPicPr>
-          <p:cNvPr id="5" name="내용 개체 틀 4">
-            <a:extLst>
-              <a:ext uri="{FF2B5EF4-FFF2-40B4-BE49-F238E27FC236}">
-                <a16:creationId xmlns:a16="http://schemas.microsoft.com/office/drawing/2014/main" id="{35E376F5-1E11-4856-7492-5996B53C15F5}"/>
-              </a:ext>
-            </a:extLst>
-          </p:cNvPr>
-          <p:cNvPicPr>
-            <a:picLocks noGrp="1" noChangeAspect="1"/>
-          </p:cNvPicPr>
-          <p:nvPr>
-            <p:ph idx="1"/>
-          </p:nvPr>
-        </p:nvPicPr>
-        <p:blipFill>
-          <a:blip r:embed="rId2"/>
-          <a:stretch>
-            <a:fillRect/>
-          </a:stretch>
-        </p:blipFill>
-        <p:spPr>
-          <a:xfrm>
-            <a:off x="3738562" y="2158206"/>
-            <a:ext cx="4714875" cy="3686175"/>
-          </a:xfrm>
-          <a:prstGeom prst="rect">
-            <a:avLst/>
-          </a:prstGeom>
-        </p:spPr>
-      </p:pic>
-    </p:spTree>
-    <p:extLst>
-      <p:ext uri="{BB962C8B-B14F-4D97-AF65-F5344CB8AC3E}">
-        <p14:creationId xmlns:p14="http://schemas.microsoft.com/office/powerpoint/2010/main" val="3319044026"/>
-      </p:ext>
-    </p:extLst>
-  </p:cSld>
-  <p:clrMapOvr>
-    <a:masterClrMapping/>
-  </p:clrMapOvr>
-</p:sld>
-</file>
-
-<file path=ppt/slides/slide9.xml><?xml version="1.0" encoding="utf-8"?>
-<p:sld xmlns:a="http://schemas.openxmlformats.org/drawingml/2006/main" xmlns:r="http://schemas.openxmlformats.org/officeDocument/2006/relationships" xmlns:p="http://schemas.openxmlformats.org/presentationml/2006/main">
-  <p:cSld>
-    <p:spTree>
-      <p:nvGrpSpPr>
-        <p:cNvPr id="1" name=""/>
-        <p:cNvGrpSpPr/>
-        <p:nvPr/>
-      </p:nvGrpSpPr>
-      <p:grpSpPr>
-        <a:xfrm>
-          <a:off x="0" y="0"/>
-          <a:ext cx="0" cy="0"/>
-          <a:chOff x="0" y="0"/>
-          <a:chExt cx="0" cy="0"/>
-        </a:xfrm>
-      </p:grpSpPr>
-      <p:sp>
-        <p:nvSpPr>
-          <p:cNvPr id="2" name="제목 1">
-            <a:extLst>
-              <a:ext uri="{FF2B5EF4-FFF2-40B4-BE49-F238E27FC236}">
-                <a16:creationId xmlns:a16="http://schemas.microsoft.com/office/drawing/2014/main" id="{8A803DBA-0D1F-9D04-5ECF-C9D9A3397540}"/>
-              </a:ext>
-            </a:extLst>
-          </p:cNvPr>
-          <p:cNvSpPr>
-            <a:spLocks noGrp="1"/>
-          </p:cNvSpPr>
-          <p:nvPr>
-            <p:ph type="title"/>
-          </p:nvPr>
-        </p:nvSpPr>
-        <p:spPr/>
-        <p:txBody>
-          <a:bodyPr/>
-          <a:lstStyle/>
-          <a:p>
-            <a:r>
-              <a:rPr lang="en-US" altLang="ko-KR" dirty="0"/>
-              <a:t>Node.js</a:t>
-            </a:r>
-            <a:endParaRPr lang="ko-KR" altLang="en-US" dirty="0"/>
-          </a:p>
-        </p:txBody>
-      </p:sp>
-      <p:pic>
-        <p:nvPicPr>
-          <p:cNvPr id="5" name="내용 개체 틀 4">
-            <a:extLst>
-              <a:ext uri="{FF2B5EF4-FFF2-40B4-BE49-F238E27FC236}">
-                <a16:creationId xmlns:a16="http://schemas.microsoft.com/office/drawing/2014/main" id="{331D4EED-8BDC-A221-08D8-8C08089A4A38}"/>
-              </a:ext>
-            </a:extLst>
-          </p:cNvPr>
-          <p:cNvPicPr>
-            <a:picLocks noGrp="1" noChangeAspect="1"/>
-          </p:cNvPicPr>
-          <p:nvPr>
-            <p:ph idx="1"/>
-          </p:nvPr>
-        </p:nvPicPr>
-        <p:blipFill>
-          <a:blip r:embed="rId2"/>
-          <a:stretch>
-            <a:fillRect/>
-          </a:stretch>
-        </p:blipFill>
-        <p:spPr>
-          <a:xfrm>
-            <a:off x="3738562" y="2158206"/>
-            <a:ext cx="4714875" cy="3686175"/>
-          </a:xfrm>
-          <a:prstGeom prst="rect">
-            <a:avLst/>
-          </a:prstGeom>
-        </p:spPr>
-      </p:pic>
-    </p:spTree>
-    <p:extLst>
-      <p:ext uri="{BB962C8B-B14F-4D97-AF65-F5344CB8AC3E}">
-        <p14:creationId xmlns:p14="http://schemas.microsoft.com/office/powerpoint/2010/main" val="1492530821"/>
       </p:ext>
     </p:extLst>
   </p:cSld>
